--- a/Asset_Manager_Data_Pitch_Deck.pptx
+++ b/Asset_Manager_Data_Pitch_Deck.pptx
@@ -295,7 +295,7 @@
           <a:lstStyle/>
           <a:p>
             <a:r>
-              <a:t>Open with the sentence on the slide, not with the deck. “Everything we are going to show you comes down to one rule: one definition, one owner, every layer. The taxonomy says what a thing means. The data products carry that meaning through without rewriting it. The semantic model publishes it once. And an AI assistant reads the same definition the dashboard does.” Then the hook: “I want to start with a question you ask every quarter and probably get five answers to.” Move to the next slide within thirty seconds. Do not explain the four chips yet; they are a map you will come back to.</a:t>
+              <a:t>Open with the sentence on the slide, not with the deck. “Everything we are going to show you comes down to one rule: one definition, one owner, every layer. The taxonomy says what a thing means. The data products carry that meaning through without rewriting it. The semantic model publishes it once. And an AI assistant reads the same definition the dashboard does.” Then the hook: “I want to start with a question you ask every quarter and get four answers to, all of them right for somebody.” Move to the next slide within thirty seconds. Do not explain the four chips yet; they are a map you will come back to.</a:t>
             </a:r>
           </a:p>
         </p:txBody>
@@ -627,7 +627,7 @@
           <a:lstStyle/>
           <a:p>
             <a:r>
-              <a:t>Bring the five answers back. “Same question as slide two. Here is what happens to each of the five once the definition is owned.” Point at the dark card first: one certified figure, one rule in three lines, one owner. Then walk the rows, one sentence each: “Sales was counting exchanges in as new money and conversions as sales; both are still visible, as net exchanges and as a conversion line that nets to zero. Finance was on settlement date; the rule picks trade date for everyone, so the gap is timing, not substance, and money market funds are their own line. Product was rolling fund net assets forward, so reinvested distributions looked like sales; the reinvestment rule puts them in market movement, once. Platforms was counting the omnibus total and the sub-accounts under it; one look-through level per record means the money is counted once. The executive pack was hand-adjusted; now it reads the dated snapshot, and every adjustment is a restatement row with a reason.” Land the band: “Nobody lost their number. Each one became a line on the page instead of an argument in the room.” The $2.02bn is illustrative, like the five figures on slide two. If asked why it sits between Finance and Product: Finance was closest to the rule already; the difference is the date basis and the money market line.</a:t>
+              <a:t>Bring the four answers back. “Same question as slide two. Every one of these was a legitimate need, so the model keeps every one of them. What changes is that each is now a named measure, defined once, with a bridge to the certified base.” Point at the dark card first: one certified figure, one rule, one owner, and the variants defined in the same place. Then walk the rows, one sentence each: “Sales keeps gross production; it is already a certified measure, Gross Sales, with rep credit beside it. Finance keeps settlement date; that is a second definition version of the same measure, published under its own name, and the gap is timing. Product keeps the roll-forward; reinvested distributions are their own certified line, so the variant is two lines added. The executive pack keeps its post-close adjustments; each one becomes a restatement row with a reason and an approver, and the pack reads the restated snapshot.” Land the band: “Nobody lost their number. Each one became a named measure with a bridge, instead of a number with the same name as three others.” The figures are illustrative, like slide two. If asked why the base sits between Finance and Product: Finance is the base on a different date; Product is the base plus one line.</a:t>
             </a:r>
           </a:p>
         </p:txBody>
@@ -673,7 +673,7 @@
           <a:lstStyle/>
           <a:p>
             <a:r>
-              <a:t>This answers the question the last slide raises: where does the certified rule actually live? Walk left to right. “The taxonomy writes it. Net flows has one definition and one owner. Every choice that made the five numbers differ, how to treat a reinvestment, an exchange, a same-owner transfer, a share-class conversion, money market funds, which date, is a named attribute with a default. The business decides each one once.” “The data products apply it. Every trade is classified and attributed as it lands, so an exchange is net at the row, not in somebody’s report logic, and an omnibus record carries one look-through level. The certified flows product keeps the figure with the definition version, the dated snapshot and the restatements behind it.” “The semantic model publishes it. It sums the product’s column; it never writes its own version. The differences are published beside the number as their own measures.” “And the scorecards, the payouts and the assistant read that one number.” Then the chip row: “Every one of the five differences from the problem slide is now a single attribute, in the taxonomy, with an owner.” Land the band. If the head of distribution asks what happens when they disagree with a default: “You pull the lever, once. The products reclassify, the model re-sums without an edit, and prior periods get a restatement row with the reason. That is the difference between a lever and a workaround.”</a:t>
+              <a:t>This answers the question the last slide raises: where do the base and its variants actually live? Walk left to right. “The taxonomy writes it. Net flows has one definition and one owner. Every choice behind the four numbers, how to treat a reinvestment, an exchange, a same-owner transfer, which date, is a named attribute with a default. A variant is that definition with one lever set differently, registered as a measure of its own. A post-close adjustment is a restatement object with a reason and an approver, not an edit.” “The data products apply it. Every trade is classified and attributed as it lands. The certified flows product keeps the base and every variant with the definition version, the dated snapshot and the restatements behind it.” “The semantic model publishes them. It sums the product’s columns; it never writes its own version. The bridge lines are published beside the measures.” “And the scorecards, the payouts and the assistant read the named measure that audience asked for.” Then the chip row: “Every one of the four needs is now a single lever in the taxonomy, with an owner.” Land the band. If the head of distribution asks what happens when they need a fifth view: “Set the lever, register the measure, and it exists everywhere with a bridge. That is the difference between a lever and a workaround.”</a:t>
             </a:r>
           </a:p>
         </p:txBody>
@@ -731,7 +731,7 @@
           <a:lstStyle/>
           <a:p>
             <a:r>
-              <a:t>For the head of distribution: “You know this slide. The numbers are made up; the reasons are not. One team counts exchanges in as new money, one nets them. One counts reinvested distributions as sales, one treats them as market movement. One uses trade date, one settlement date. One counts the platform omnibus total and the sub-accounts under it.” Then the pivot: “The cost is not the arithmetic. It is the month-end hour arguing about which number is right, and not being able to tell a board, or a wholesaler whose payout depends on it, which definition a given report used.” Land the band: “Every one of those five differences is a definition question. Not one of them is a technology question. That is exactly what a taxonomy settles, and why a new BI tool or a new AI assistant on top of the old definitions gives you five answers faster.” For the head of data management, add one line: “And nobody downstream can fix this, because nobody downstream owns the definition.”</a:t>
+              <a:t>For the head of distribution: “You know this slide. The numbers are made up; the needs are not. The field is paid on gross production. Finance closes on settlement date. Product rolls the fund’s net assets forward, so reinvestments are in. The board pack carries the adjustments that were agreed after the close. Every one of those is a proper need, and every one of those teams is right.” Then the pivot: “The cost is not that they differ. It is that all four are called net flows, each is computed in its own tool from its own pull of the data, and nobody can bridge one to another or tell a board which one a report used.” Land the band: “The fix is not to pick a winner. It is one certified base, four named measures defined once, and a bridge between them that the model publishes rather than a team reconstructs.” For the head of data management, add one line: “And nobody downstream can fix this today, because nobody downstream owns the definitions.”</a:t>
             </a:r>
           </a:p>
         </p:txBody>
@@ -817,7 +817,7 @@
           <a:lstStyle/>
           <a:p>
             <a:r>
-              <a:t>This is the slide that moves their mental model, so take it slowly and do not be condescending about it. “When most people say taxonomy they mean the left-hand box: a glossary that defines the measures a report aggregates. That is a real and useful thing, and we have built it too. It is the top of the stack, not the bottom.” “What we mean by a reference data taxonomy is the right-hand box: the inventory of the things those measures are made of. Not net flows, but transaction, share class, distributor firm, advisor, territory, omnibus account. Each with one definition and one owner, written once for the firm.” Land the band: “A measure is only as good as the concepts under it. If nobody owns what a sale is, or when an exchange counts as a redemption, the definition of net flows is an opinion with arithmetic attached. That is why five teams get five numbers, even when they all have a glossary.” For the head of data management: “A glossary tool holds whatever you load into it. The taxonomy is what decides what gets loaded.”</a:t>
+              <a:t>This is the slide that moves their mental model, so take it slowly and do not be condescending about it. “When most people say taxonomy they mean the left-hand box: a glossary that defines the measures a report aggregates. That is a real and useful thing, and we have built it too. It is the top of the stack, not the bottom.” “What we mean by a reference data taxonomy is the right-hand box: the inventory of the things those measures are made of. Not net flows, but transaction, share class, distributor firm, advisor, territory, omnibus account. Each with one definition and one owner, written once for the firm.” Land the band: “A measure is only as good as the concepts under it. If nobody owns what a sale is, or when an exchange counts as a redemption, the definition of net flows is an opinion with arithmetic attached. That is why four teams get four numbers with one name, even when they all have a glossary.” For the head of data management: “A glossary tool holds whatever you load into it. The taxonomy is what decides what gets loaded.”</a:t>
             </a:r>
           </a:p>
         </p:txBody>
@@ -1333,7 +1333,7 @@
           <a:lstStyle/>
           <a:p>
             <a:r>
-              <a:t>This is the slide the head of distribution came for. Keep it concrete. “Everyone is putting an assistant on top of their data. The ones that work are pointed at a semantic layer, not at raw tables, and the time goes into teaching the assistant the business: what net flows means, who may see what, what it must refuse. Here that is already written down, so there is nothing to teach twice.” Left card: “A question in plain words. Back comes the certified metric, the period, the figures by channel, and under them the model, the product and the taxonomy attribute the figure was read from, with the owner’s name. The flow treatment rule from the five-answers slide is in the answer itself.” Middle: “Access by role, from the model’s own page. Distribution leadership sees every row. Sales and partner management see certified flows but not the attribution-quality tables. The broad internal role never sees the forecast before the earnings release. The assistant inherits exactly the scope of the person asking.” Right: “And the model says what it cannot answer yet, with the reason and the registered gap that would fix it: net flows against plan by channel, because the finance plan has no channel. An assistant that says ‘not yet, and here is why’ is the one people keep using.” Land the band. “The order matters. You cannot build this layer without governed products, and you cannot build governed products without one definition and one owner per concept. Skip the bottom and the assistant inherits the glossary you have today, and gives you the five answers faster.”</a:t>
+              <a:t>This is the slide the head of distribution came for. Keep it concrete. “Everyone is putting an assistant on top of their data. The ones that work are pointed at a semantic layer, not at raw tables, and the time goes into teaching the assistant the business: what net flows means, who may see what, what it must refuse. Here that is already written down, so there is nothing to teach twice.” Left card: “A question in plain words. Back comes the certified metric, the period, the figures by channel, and under them the model, the product and the taxonomy attribute the figure was read from, with the owner’s name. The flow treatment rule from the four-answers slide is in the answer itself.” Middle: “Access by role, from the model’s own page. Distribution leadership sees every row. Sales and partner management see certified flows but not the attribution-quality tables. The broad internal role never sees the forecast before the earnings release. The assistant inherits exactly the scope of the person asking.” Right: “And the model says what it cannot answer yet, with the reason and the registered gap that would fix it: net flows against plan by channel, because the finance plan has no channel. An assistant that says ‘not yet, and here is why’ is the one people keep using.” Land the band. “The order matters. You cannot build this layer without governed products, and you cannot build governed products without one definition and one owner per concept. Skip the bottom and the assistant inherits the glossary you have today, and gives you the four answers faster.”</a:t>
             </a:r>
           </a:p>
         </p:txBody>
@@ -3213,7 +3213,7 @@
                 <a:ea typeface="Arial" pitchFamily="34" charset="-122"/>
                 <a:cs typeface="Arial" pitchFamily="34" charset="-120"/>
               </a:rPr>
-              <a:t>Nothing has to be taught twice.</a:t>
+              <a:t>Nothing has to be taught twice. </a:t>
             </a:r>
             <a:r>
               <a:rPr lang="en-US" sz="1200" b="0" dirty="0">
@@ -3224,7 +3224,7 @@
                 <a:ea typeface="Arial" pitchFamily="34" charset="-122"/>
                 <a:cs typeface="Arial" pitchFamily="34" charset="-120"/>
               </a:rPr>
-              <a:t> The definitions, the access rules and the gaps the dashboard runs on are the ones the assistant runs on. Point it at today’s glossary instead and it gives you the five answers faster.</a:t>
+              <a:t>The definitions, the access rules and the gaps the dashboard runs on are the ones the assistant runs on. Point it at today’s glossary instead and it gives you the four answers faster.</a:t>
             </a:r>
             <a:endParaRPr lang="en-US" sz="1200" dirty="0"/>
           </a:p>
@@ -5034,7 +5034,7 @@
                 </a:solidFill>
                 <a:latin typeface="Arial"/>
               </a:rPr>
-              <a:t>Each choice is a lever the business pulls once, not five times.</a:t>
+              <a:t>A variant: one lever set differently, registered as its own measure.</a:t>
             </a:r>
           </a:p>
         </p:txBody>
@@ -5268,7 +5268,7 @@
                 </a:solidFill>
                 <a:latin typeface="Arial"/>
               </a:rPr>
-              <a:t>Attributed transactions: every trade is classified and attributed as it lands. Purchase, redemption, exchange, conversion, transfer; omnibus or look-through.</a:t>
+              <a:t>Attributed transactions: every trade is classified and attributed as it lands. Purchase, redemption, exchange, conversion, transfer.</a:t>
             </a:r>
           </a:p>
           <a:p>
@@ -5284,7 +5284,7 @@
                 </a:solidFill>
                 <a:latin typeface="Arial"/>
               </a:rPr>
-              <a:t>Certified Flows &amp; AUM: the figure by period, channel and territory, with the definition version, the dated snapshot and any restatement behind it.</a:t>
+              <a:t>Certified Flows &amp; AUM: the base and each named variant by period, channel and territory, with the definition version, the dated snapshot and every restatement behind it.</a:t>
             </a:r>
           </a:p>
         </p:txBody>
@@ -5502,7 +5502,7 @@
                 </a:solidFill>
                 <a:latin typeface="Arial"/>
               </a:rPr>
-              <a:t>Publishes the number. Never redefines it.</a:t>
+              <a:t>Publishes the measures. Never redefines them.</a:t>
             </a:r>
           </a:p>
           <a:p>
@@ -5518,7 +5518,7 @@
                 </a:solidFill>
                 <a:latin typeface="Arial"/>
               </a:rPr>
-              <a:t>Net Flows is the product’s column, summed, with its description and source attached.</a:t>
+              <a:t>Net Flows is the product’s column, summed, with its description and source attached. So is each variant, under its own name.</a:t>
             </a:r>
           </a:p>
           <a:p>
@@ -5534,7 +5534,7 @@
                 </a:solidFill>
                 <a:latin typeface="Arial"/>
               </a:rPr>
-              <a:t>The differences sit beside it as named measures: net exchanges, market movement, reinvested distributions, restatement impact.</a:t>
+              <a:t>The bridge lines sit beside them: redemptions, net exchanges, reinvested distributions, restatement impact.</a:t>
             </a:r>
           </a:p>
         </p:txBody>
@@ -5752,7 +5752,7 @@
                 </a:solidFill>
                 <a:latin typeface="Arial"/>
               </a:rPr>
-              <a:t>Reads the same number.</a:t>
+              <a:t>Reads the named measure the audience asked for.</a:t>
             </a:r>
           </a:p>
           <a:p>
@@ -5768,7 +5768,7 @@
                 </a:solidFill>
                 <a:latin typeface="Arial"/>
               </a:rPr>
-              <a:t>Dashboards, scorecards, payouts and the assistant return the same figure, and can say which definition version it used.</a:t>
+              <a:t>Dashboards, scorecards, payouts and the assistant return the same figure for the same name, and can say which definition version it used.</a:t>
             </a:r>
           </a:p>
           <a:p>
@@ -5784,7 +5784,7 @@
                 </a:solidFill>
                 <a:latin typeface="Arial"/>
               </a:rPr>
-              <a:t>Nothing to reconcile, because nothing was redefined on the way up.</a:t>
+              <a:t>Nothing to reconcile, because the bridge is published, not rebuilt.</a:t>
             </a:r>
           </a:p>
         </p:txBody>
@@ -5819,7 +5819,7 @@
                 </a:solidFill>
                 <a:latin typeface="Arial"/>
               </a:rPr>
-              <a:t>EACH OF THE FIVE DIFFERENCES IS NOW ONE TAXONOMY ATTRIBUTE, OWNED ONCE</a:t>
+              <a:t>EACH OF THE FOUR NEEDS IS NOW ONE TAXONOMY LEVER, OWNED ONCE</a:t>
             </a:r>
           </a:p>
         </p:txBody>
@@ -5833,7 +5833,7 @@
         <p:spPr>
           <a:xfrm>
             <a:off x="813816" y="5084064"/>
-            <a:ext cx="2064715" cy="512064"/>
+            <a:ext cx="2615184" cy="512064"/>
           </a:xfrm>
           <a:prstGeom prst="rect">
             <a:avLst/>
@@ -5877,7 +5877,7 @@
         <p:spPr>
           <a:xfrm>
             <a:off x="941832" y="5084064"/>
-            <a:ext cx="1808683" cy="512064"/>
+            <a:ext cx="2359152" cy="512064"/>
           </a:xfrm>
           <a:prstGeom prst="rect">
             <a:avLst/>
@@ -5914,7 +5914,7 @@
                 </a:solidFill>
                 <a:latin typeface="Arial"/>
               </a:rPr>
-              <a:t>Exchange Treatment</a:t>
+              <a:t>Exchange Treatment · Salesperson Credit</a:t>
             </a:r>
           </a:p>
         </p:txBody>
@@ -5927,8 +5927,8 @@
         </p:nvSpPr>
         <p:spPr>
           <a:xfrm>
-            <a:off x="3015691" y="5084064"/>
-            <a:ext cx="2064715" cy="512064"/>
+            <a:off x="3566160" y="5084064"/>
+            <a:ext cx="2615184" cy="512064"/>
           </a:xfrm>
           <a:prstGeom prst="rect">
             <a:avLst/>
@@ -5971,8 +5971,8 @@
         </p:nvSpPr>
         <p:spPr>
           <a:xfrm>
-            <a:off x="3143707" y="5084064"/>
-            <a:ext cx="1808683" cy="512064"/>
+            <a:off x="3694176" y="5084064"/>
+            <a:ext cx="2359152" cy="512064"/>
           </a:xfrm>
           <a:prstGeom prst="rect">
             <a:avLst/>
@@ -6022,8 +6022,8 @@
         </p:nvSpPr>
         <p:spPr>
           <a:xfrm>
-            <a:off x="5217566" y="5084064"/>
-            <a:ext cx="2064715" cy="512064"/>
+            <a:off x="6318503" y="5084064"/>
+            <a:ext cx="2615184" cy="512064"/>
           </a:xfrm>
           <a:prstGeom prst="rect">
             <a:avLst/>
@@ -6066,8 +6066,8 @@
         </p:nvSpPr>
         <p:spPr>
           <a:xfrm>
-            <a:off x="5345582" y="5084064"/>
-            <a:ext cx="1808683" cy="512064"/>
+            <a:off x="6446519" y="5084064"/>
+            <a:ext cx="2359152" cy="512064"/>
           </a:xfrm>
           <a:prstGeom prst="rect">
             <a:avLst/>
@@ -6117,8 +6117,8 @@
         </p:nvSpPr>
         <p:spPr>
           <a:xfrm>
-            <a:off x="7419441" y="5084064"/>
-            <a:ext cx="2064715" cy="512064"/>
+            <a:off x="9070848" y="5084064"/>
+            <a:ext cx="2615184" cy="512064"/>
           </a:xfrm>
           <a:prstGeom prst="rect">
             <a:avLst/>
@@ -6161,8 +6161,8 @@
         </p:nvSpPr>
         <p:spPr>
           <a:xfrm>
-            <a:off x="7547457" y="5084064"/>
-            <a:ext cx="1808683" cy="512064"/>
+            <a:off x="9198864" y="5084064"/>
+            <a:ext cx="2359152" cy="512064"/>
           </a:xfrm>
           <a:prstGeom prst="rect">
             <a:avLst/>
@@ -6183,7 +6183,7 @@
                 </a:solidFill>
                 <a:latin typeface="Arial"/>
               </a:rPr>
-              <a:t>PLATFORMS</a:t>
+              <a:t>EXECUTIVE PACK</a:t>
             </a:r>
           </a:p>
           <a:p>
@@ -6199,27 +6199,27 @@
                 </a:solidFill>
                 <a:latin typeface="Arial"/>
               </a:rPr>
-              <a:t>Look-Through Level</a:t>
-            </a:r>
-          </a:p>
-        </p:txBody>
-      </p:sp>
-      <p:sp>
-        <p:nvSpPr>
-          <p:cNvPr id="31" name="Chip 4"/>
-          <p:cNvSpPr/>
-          <p:nvPr/>
-        </p:nvSpPr>
-        <p:spPr>
-          <a:xfrm>
-            <a:off x="9621316" y="5084064"/>
-            <a:ext cx="2064715" cy="512064"/>
+              <a:t>Restatement Reason · Approver</a:t>
+            </a:r>
+          </a:p>
+        </p:txBody>
+      </p:sp>
+      <p:sp>
+        <p:nvSpPr>
+          <p:cNvPr id="31" name="Band"/>
+          <p:cNvSpPr/>
+          <p:nvPr/>
+        </p:nvSpPr>
+        <p:spPr>
+          <a:xfrm>
+            <a:off x="813816" y="5760720"/>
+            <a:ext cx="10872216" cy="457200"/>
           </a:xfrm>
           <a:prstGeom prst="rect">
             <a:avLst/>
           </a:prstGeom>
           <a:solidFill>
-            <a:srgbClr val="1E49E2"/>
+            <a:srgbClr val="0C233C"/>
           </a:solidFill>
           <a:ln>
             <a:noFill/>
@@ -6256,8 +6256,8 @@
         </p:nvSpPr>
         <p:spPr>
           <a:xfrm>
-            <a:off x="9749332" y="5084064"/>
-            <a:ext cx="1808683" cy="512064"/>
+            <a:off x="1115568" y="5760720"/>
+            <a:ext cx="10287000" cy="457200"/>
           </a:xfrm>
           <a:prstGeom prst="rect">
             <a:avLst/>
@@ -6272,108 +6272,13 @@
           <a:p>
             <a:pPr algn="l"/>
             <a:r>
-              <a:rPr sz="750" b="1" spc="80">
-                <a:solidFill>
-                  <a:srgbClr val="A7B3C4"/>
+              <a:rPr sz="1300" b="0">
+                <a:solidFill>
+                  <a:srgbClr val="FFFFFF"/>
                 </a:solidFill>
                 <a:latin typeface="Arial"/>
               </a:rPr>
-              <a:t>EXECUTIVE PACK</a:t>
-            </a:r>
-          </a:p>
-          <a:p>
-            <a:pPr algn="l">
-              <a:spcBef>
-                <a:spcPts val="100"/>
-              </a:spcBef>
-            </a:pPr>
-            <a:r>
-              <a:rPr sz="1050" b="1">
-                <a:solidFill>
-                  <a:srgbClr val="FFFFFF"/>
-                </a:solidFill>
-                <a:latin typeface="Arial"/>
-              </a:rPr>
-              <a:t>Snapshot and Restatement</a:t>
-            </a:r>
-          </a:p>
-        </p:txBody>
-      </p:sp>
-      <p:sp>
-        <p:nvSpPr>
-          <p:cNvPr id="33" name="Band"/>
-          <p:cNvSpPr/>
-          <p:nvPr/>
-        </p:nvSpPr>
-        <p:spPr>
-          <a:xfrm>
-            <a:off x="813816" y="5760720"/>
-            <a:ext cx="10872216" cy="457200"/>
-          </a:xfrm>
-          <a:prstGeom prst="rect">
-            <a:avLst/>
-          </a:prstGeom>
-          <a:solidFill>
-            <a:srgbClr val="0C233C"/>
-          </a:solidFill>
-          <a:ln>
-            <a:noFill/>
-          </a:ln>
-          <a:effectLst/>
-        </p:spPr>
-        <p:style>
-          <a:lnRef idx="1">
-            <a:schemeClr val="accent1"/>
-          </a:lnRef>
-          <a:fillRef idx="3">
-            <a:schemeClr val="accent1"/>
-          </a:fillRef>
-          <a:effectRef idx="2">
-            <a:schemeClr val="accent1"/>
-          </a:effectRef>
-          <a:fontRef idx="minor">
-            <a:schemeClr val="lt1"/>
-          </a:fontRef>
-        </p:style>
-        <p:txBody>
-          <a:bodyPr rtlCol="0" anchor="ctr"/>
-          <a:lstStyle/>
-          <a:p>
-            <a:pPr algn="ctr"/>
-          </a:p>
-        </p:txBody>
-      </p:sp>
-      <p:sp>
-        <p:nvSpPr>
-          <p:cNvPr id="34" name="TextBox 33"/>
-          <p:cNvSpPr txBox="1"/>
-          <p:nvPr/>
-        </p:nvSpPr>
-        <p:spPr>
-          <a:xfrm>
-            <a:off x="1115568" y="5760720"/>
-            <a:ext cx="10287000" cy="457200"/>
-          </a:xfrm>
-          <a:prstGeom prst="rect">
-            <a:avLst/>
-          </a:prstGeom>
-          <a:noFill/>
-        </p:spPr>
-        <p:txBody>
-          <a:bodyPr wrap="square" lIns="0" rIns="0" tIns="0" bIns="0" anchor="ctr">
-            <a:spAutoFit/>
-          </a:bodyPr>
-          <a:lstStyle/>
-          <a:p>
-            <a:pPr algn="l"/>
-            <a:r>
-              <a:rPr sz="1300" b="0">
-                <a:solidFill>
-                  <a:srgbClr val="FFFFFF"/>
-                </a:solidFill>
-                <a:latin typeface="Arial"/>
-              </a:rPr>
-              <a:t>Pull a lever once, in the taxonomy. The products reclassify, the model re-sums, the pack restates. Nobody downstream edits anything.</a:t>
+              <a:t>Set a lever once, in the taxonomy, and the variant is a named measure everywhere. Nobody downstream edits anything.</a:t>
             </a:r>
           </a:p>
         </p:txBody>
@@ -6536,7 +6441,7 @@
                 <a:ea typeface="Arial" pitchFamily="34" charset="-122"/>
                 <a:cs typeface="Arial" pitchFamily="34" charset="-120"/>
               </a:rPr>
-              <a:t>“Net flows, last quarter.” One question, five answers.</a:t>
+              <a:t>“Net flows, last quarter.” One question, four answers, all of them needed.</a:t>
             </a:r>
             <a:endParaRPr lang="en-US" sz="3251" dirty="0"/>
           </a:p>
@@ -6550,8 +6455,8 @@
         </p:nvSpPr>
         <p:spPr>
           <a:xfrm>
-            <a:off x="815975" y="2465288"/>
-            <a:ext cx="1984970" cy="2079327"/>
+            <a:off x="813816" y="2465288"/>
+            <a:ext cx="2487168" cy="2079327"/>
           </a:xfrm>
           <a:prstGeom prst="roundRect">
             <a:avLst>
@@ -6581,8 +6486,8 @@
         </p:nvSpPr>
         <p:spPr>
           <a:xfrm>
-            <a:off x="1022350" y="2671663"/>
-            <a:ext cx="1623020" cy="230287"/>
+            <a:off x="1024128" y="2671663"/>
+            <a:ext cx="2066544" cy="230287"/>
           </a:xfrm>
           <a:prstGeom prst="rect">
             <a:avLst/>
@@ -6625,8 +6530,8 @@
         </p:nvSpPr>
         <p:spPr>
           <a:xfrm>
-            <a:off x="1022350" y="2978150"/>
-            <a:ext cx="1623020" cy="427831"/>
+            <a:off x="1024128" y="2978150"/>
+            <a:ext cx="2066544" cy="427831"/>
           </a:xfrm>
           <a:prstGeom prst="rect">
             <a:avLst/>
@@ -6655,7 +6560,7 @@
                 <a:ea typeface="Arial" pitchFamily="34" charset="-122"/>
                 <a:cs typeface="Arial" pitchFamily="34" charset="-120"/>
               </a:rPr>
-              <a:t>$2.41bn</a:t>
+              <a:t>$2.71bn</a:t>
             </a:r>
             <a:endParaRPr lang="en-US" sz="2878" dirty="0"/>
           </a:p>
@@ -6669,8 +6574,8 @@
         </p:nvSpPr>
         <p:spPr>
           <a:xfrm>
-            <a:off x="1022350" y="3482181"/>
-            <a:ext cx="1623020" cy="881459"/>
+            <a:off x="1024128" y="3482181"/>
+            <a:ext cx="2066544" cy="881459"/>
           </a:xfrm>
           <a:prstGeom prst="rect">
             <a:avLst/>
@@ -6699,7 +6604,7 @@
                 <a:ea typeface="Arial" pitchFamily="34" charset="-122"/>
                 <a:cs typeface="Arial" pitchFamily="34" charset="-120"/>
               </a:rPr>
-              <a:t>Counts exchanges in as gross and conversions as rep credit. Trade date.</a:t>
+              <a:t>Gross production, with exchanges in and conversions credited to the rep. The field is paid on it.</a:t>
             </a:r>
             <a:endParaRPr lang="en-US" sz="1251" dirty="0"/>
           </a:p>
@@ -6713,8 +6618,8 @@
         </p:nvSpPr>
         <p:spPr>
           <a:xfrm>
-            <a:off x="2959695" y="2465288"/>
-            <a:ext cx="1985070" cy="2079327"/>
+            <a:off x="3508278" y="2465288"/>
+            <a:ext cx="2487168" cy="2079327"/>
           </a:xfrm>
           <a:prstGeom prst="roundRect">
             <a:avLst>
@@ -6744,8 +6649,8 @@
         </p:nvSpPr>
         <p:spPr>
           <a:xfrm>
-            <a:off x="3166070" y="2671663"/>
-            <a:ext cx="1623120" cy="238720"/>
+            <a:off x="3718590" y="2671663"/>
+            <a:ext cx="2066544" cy="238720"/>
           </a:xfrm>
           <a:prstGeom prst="rect">
             <a:avLst/>
@@ -6788,8 +6693,8 @@
         </p:nvSpPr>
         <p:spPr>
           <a:xfrm>
-            <a:off x="3166070" y="2986584"/>
-            <a:ext cx="1623120" cy="444500"/>
+            <a:off x="3718590" y="2986584"/>
+            <a:ext cx="2066544" cy="444500"/>
           </a:xfrm>
           <a:prstGeom prst="rect">
             <a:avLst/>
@@ -6832,8 +6737,8 @@
         </p:nvSpPr>
         <p:spPr>
           <a:xfrm>
-            <a:off x="3166070" y="3507284"/>
-            <a:ext cx="1623120" cy="693936"/>
+            <a:off x="3718590" y="3507284"/>
+            <a:ext cx="2066544" cy="693936"/>
           </a:xfrm>
           <a:prstGeom prst="rect">
             <a:avLst/>
@@ -6862,7 +6767,7 @@
                 <a:ea typeface="Arial" pitchFamily="34" charset="-122"/>
                 <a:cs typeface="Arial" pitchFamily="34" charset="-120"/>
               </a:rPr>
-              <a:t>Money market funds out. Settlement date. Reinvestments out.</a:t>
+              <a:t>Settlement date, so flows tie to cash and the ledger. Money market and reinvestments out.</a:t>
             </a:r>
             <a:endParaRPr lang="en-US" sz="1300" dirty="0"/>
           </a:p>
@@ -6876,8 +6781,8 @@
         </p:nvSpPr>
         <p:spPr>
           <a:xfrm>
-            <a:off x="5103515" y="2465288"/>
-            <a:ext cx="1984970" cy="2079327"/>
+            <a:off x="6202740" y="2465288"/>
+            <a:ext cx="2487168" cy="2079327"/>
           </a:xfrm>
           <a:prstGeom prst="roundRect">
             <a:avLst>
@@ -6907,8 +6812,8 @@
         </p:nvSpPr>
         <p:spPr>
           <a:xfrm>
-            <a:off x="5309890" y="2671663"/>
-            <a:ext cx="1623020" cy="230287"/>
+            <a:off x="6413052" y="2671663"/>
+            <a:ext cx="2066544" cy="230287"/>
           </a:xfrm>
           <a:prstGeom prst="rect">
             <a:avLst/>
@@ -6951,8 +6856,8 @@
         </p:nvSpPr>
         <p:spPr>
           <a:xfrm>
-            <a:off x="5309890" y="2978150"/>
-            <a:ext cx="1623020" cy="427831"/>
+            <a:off x="6413052" y="2978150"/>
+            <a:ext cx="2066544" cy="427831"/>
           </a:xfrm>
           <a:prstGeom prst="rect">
             <a:avLst/>
@@ -6995,8 +6900,8 @@
         </p:nvSpPr>
         <p:spPr>
           <a:xfrm>
-            <a:off x="5309890" y="3482181"/>
-            <a:ext cx="1623020" cy="881459"/>
+            <a:off x="6413052" y="3482181"/>
+            <a:ext cx="2066544" cy="881459"/>
           </a:xfrm>
           <a:prstGeom prst="rect">
             <a:avLst/>
@@ -7025,7 +6930,7 @@
                 <a:ea typeface="Arial" pitchFamily="34" charset="-122"/>
                 <a:cs typeface="Arial" pitchFamily="34" charset="-120"/>
               </a:rPr>
-              <a:t>Rolls fund net assets forward, so reinvested distributions count as sales.</a:t>
+              <a:t>Net flows plus reinvested distributions, so the fund’s net assets roll forward.</a:t>
             </a:r>
             <a:endParaRPr lang="en-US" sz="1251" dirty="0"/>
           </a:p>
@@ -7039,8 +6944,8 @@
         </p:nvSpPr>
         <p:spPr>
           <a:xfrm>
-            <a:off x="7247235" y="2465288"/>
-            <a:ext cx="1985070" cy="2079327"/>
+            <a:off x="8897202" y="2465288"/>
+            <a:ext cx="2487168" cy="2079327"/>
           </a:xfrm>
           <a:prstGeom prst="roundRect">
             <a:avLst>
@@ -7070,8 +6975,8 @@
         </p:nvSpPr>
         <p:spPr>
           <a:xfrm>
-            <a:off x="7453610" y="2671663"/>
-            <a:ext cx="1623120" cy="204093"/>
+            <a:off x="9107514" y="2671663"/>
+            <a:ext cx="2066544" cy="204093"/>
           </a:xfrm>
           <a:prstGeom prst="rect">
             <a:avLst/>
@@ -7100,7 +7005,7 @@
                 <a:ea typeface="Arial" pitchFamily="34" charset="-122"/>
                 <a:cs typeface="Arial" pitchFamily="34" charset="-120"/>
               </a:rPr>
-              <a:t>PLATFORMS</a:t>
+              <a:t>EXECUTIVE PACK</a:t>
             </a:r>
             <a:endParaRPr lang="en-US" sz="1016" dirty="0"/>
           </a:p>
@@ -7114,8 +7019,8 @@
         </p:nvSpPr>
         <p:spPr>
           <a:xfrm>
-            <a:off x="7453610" y="2951956"/>
-            <a:ext cx="1623120" cy="376535"/>
+            <a:off x="9107514" y="2951956"/>
+            <a:ext cx="2066544" cy="376535"/>
           </a:xfrm>
           <a:prstGeom prst="rect">
             <a:avLst/>
@@ -7138,13 +7043,13 @@
             <a:r>
               <a:rPr lang="en-US" sz="2522" b="1" dirty="0">
                 <a:solidFill>
-                  <a:srgbClr val="C8166F"/>
-                </a:solidFill>
-                <a:latin typeface="Arial" pitchFamily="34" charset="0"/>
-                <a:ea typeface="Arial" pitchFamily="34" charset="-122"/>
-                <a:cs typeface="Arial" pitchFamily="34" charset="-120"/>
-              </a:rPr>
-              <a:t>$2.67bn</a:t>
+                  <a:srgbClr val="0C233C"/>
+                </a:solidFill>
+                <a:latin typeface="Arial" pitchFamily="34" charset="0"/>
+                <a:ea typeface="Arial" pitchFamily="34" charset="-122"/>
+                <a:cs typeface="Arial" pitchFamily="34" charset="-120"/>
+              </a:rPr>
+              <a:t>$2.20bn</a:t>
             </a:r>
             <a:endParaRPr lang="en-US" sz="2522" dirty="0"/>
           </a:p>
@@ -7158,8 +7063,8 @@
         </p:nvSpPr>
         <p:spPr>
           <a:xfrm>
-            <a:off x="7453610" y="3404691"/>
-            <a:ext cx="1623120" cy="958949"/>
+            <a:off x="9107514" y="3404691"/>
+            <a:ext cx="2066544" cy="958949"/>
           </a:xfrm>
           <a:prstGeom prst="rect">
             <a:avLst/>
@@ -7188,172 +7093,9 @@
                 <a:ea typeface="Arial" pitchFamily="34" charset="-122"/>
                 <a:cs typeface="Arial" pitchFamily="34" charset="-120"/>
               </a:rPr>
-              <a:t>Counts platform omnibus totals and the look-through sub-accounts under them.</a:t>
+              <a:t>Last quarter’s figure after two approved post-close adjustments.</a:t>
             </a:r>
             <a:endParaRPr lang="en-US" sz="1255" dirty="0"/>
-          </a:p>
-        </p:txBody>
-      </p:sp>
-      <p:sp>
-        <p:nvSpPr>
-          <p:cNvPr id="20" name="Shape 18"/>
-          <p:cNvSpPr/>
-          <p:nvPr/>
-        </p:nvSpPr>
-        <p:spPr>
-          <a:xfrm>
-            <a:off x="9391055" y="2465288"/>
-            <a:ext cx="1984970" cy="2079327"/>
-          </a:xfrm>
-          <a:prstGeom prst="roundRect">
-            <a:avLst>
-              <a:gd name="adj" fmla="val 4959"/>
-            </a:avLst>
-          </a:prstGeom>
-          <a:solidFill>
-            <a:srgbClr val="EEF1F8"/>
-          </a:solidFill>
-          <a:ln>
-            <a:noFill/>
-          </a:ln>
-        </p:spPr>
-        <p:txBody>
-          <a:bodyPr/>
-          <a:lstStyle/>
-          <a:p>
-            <a:endParaRPr lang="en-US"/>
-          </a:p>
-        </p:txBody>
-      </p:sp>
-      <p:sp>
-        <p:nvSpPr>
-          <p:cNvPr id="21" name="Text 19"/>
-          <p:cNvSpPr/>
-          <p:nvPr/>
-        </p:nvSpPr>
-        <p:spPr>
-          <a:xfrm>
-            <a:off x="9597430" y="2671663"/>
-            <a:ext cx="1623020" cy="230287"/>
-          </a:xfrm>
-          <a:prstGeom prst="rect">
-            <a:avLst/>
-          </a:prstGeom>
-          <a:noFill/>
-          <a:ln/>
-        </p:spPr>
-        <p:txBody>
-          <a:bodyPr wrap="square" lIns="0" tIns="0" rIns="0" bIns="0" rtlCol="0" anchor="t">
-            <a:normAutofit/>
-          </a:bodyPr>
-          <a:lstStyle/>
-          <a:p>
-            <a:pPr marL="0" indent="0" algn="l">
-              <a:lnSpc>
-                <a:spcPts val="1622"/>
-              </a:lnSpc>
-              <a:buNone/>
-            </a:pPr>
-            <a:r>
-              <a:rPr lang="en-US" sz="1159" b="1" kern="0" spc="100" dirty="0">
-                <a:solidFill>
-                  <a:srgbClr val="535E6C"/>
-                </a:solidFill>
-                <a:latin typeface="Arial" pitchFamily="34" charset="0"/>
-                <a:ea typeface="Arial" pitchFamily="34" charset="-122"/>
-                <a:cs typeface="Arial" pitchFamily="34" charset="-120"/>
-              </a:rPr>
-              <a:t>EXECUTIVE PACK</a:t>
-            </a:r>
-            <a:endParaRPr lang="en-US" sz="1159" dirty="0"/>
-          </a:p>
-        </p:txBody>
-      </p:sp>
-      <p:sp>
-        <p:nvSpPr>
-          <p:cNvPr id="22" name="Text 20"/>
-          <p:cNvSpPr/>
-          <p:nvPr/>
-        </p:nvSpPr>
-        <p:spPr>
-          <a:xfrm>
-            <a:off x="9597430" y="2978150"/>
-            <a:ext cx="1623020" cy="427831"/>
-          </a:xfrm>
-          <a:prstGeom prst="rect">
-            <a:avLst/>
-          </a:prstGeom>
-          <a:noFill/>
-          <a:ln/>
-        </p:spPr>
-        <p:txBody>
-          <a:bodyPr wrap="square" lIns="0" tIns="0" rIns="0" bIns="0" rtlCol="0" anchor="t">
-            <a:normAutofit/>
-          </a:bodyPr>
-          <a:lstStyle/>
-          <a:p>
-            <a:pPr marL="0" indent="0" algn="l">
-              <a:lnSpc>
-                <a:spcPts val="3166"/>
-              </a:lnSpc>
-              <a:buNone/>
-            </a:pPr>
-            <a:r>
-              <a:rPr lang="en-US" sz="2878" b="1" dirty="0">
-                <a:solidFill>
-                  <a:srgbClr val="0C233C"/>
-                </a:solidFill>
-                <a:latin typeface="Arial" pitchFamily="34" charset="0"/>
-                <a:ea typeface="Arial" pitchFamily="34" charset="-122"/>
-                <a:cs typeface="Arial" pitchFamily="34" charset="-120"/>
-              </a:rPr>
-              <a:t>$2.20bn</a:t>
-            </a:r>
-            <a:endParaRPr lang="en-US" sz="2878" dirty="0"/>
-          </a:p>
-        </p:txBody>
-      </p:sp>
-      <p:sp>
-        <p:nvSpPr>
-          <p:cNvPr id="23" name="Text 21"/>
-          <p:cNvSpPr/>
-          <p:nvPr/>
-        </p:nvSpPr>
-        <p:spPr>
-          <a:xfrm>
-            <a:off x="9597430" y="3482181"/>
-            <a:ext cx="1623020" cy="881459"/>
-          </a:xfrm>
-          <a:prstGeom prst="rect">
-            <a:avLst/>
-          </a:prstGeom>
-          <a:noFill/>
-          <a:ln/>
-        </p:spPr>
-        <p:txBody>
-          <a:bodyPr wrap="square" lIns="0" tIns="0" rIns="0" bIns="0" rtlCol="0" anchor="t">
-            <a:normAutofit/>
-          </a:bodyPr>
-          <a:lstStyle/>
-          <a:p>
-            <a:pPr marL="0" indent="0" algn="l">
-              <a:lnSpc>
-                <a:spcPts val="1689"/>
-              </a:lnSpc>
-              <a:buNone/>
-            </a:pPr>
-            <a:r>
-              <a:rPr lang="en-US" sz="1251" dirty="0">
-                <a:solidFill>
-                  <a:srgbClr val="1A2B3C"/>
-                </a:solidFill>
-                <a:latin typeface="Arial" pitchFamily="34" charset="0"/>
-                <a:ea typeface="Arial" pitchFamily="34" charset="-122"/>
-                <a:cs typeface="Arial" pitchFamily="34" charset="-120"/>
-              </a:rPr>
-              <a:t>Hand-adjusted from last quarter’s method, with two restatements.</a:t>
-            </a:r>
-            <a:endParaRPr lang="en-US" sz="1251" dirty="0"/>
           </a:p>
         </p:txBody>
       </p:sp>
@@ -7424,7 +7166,7 @@
                 <a:ea typeface="Arial" pitchFamily="34" charset="-122"/>
                 <a:cs typeface="Arial" pitchFamily="34" charset="-120"/>
               </a:rPr>
-              <a:t>Every difference is a definition question: what counts as a sale, which date, which account level, who owns the rule. None of them is a technology question.</a:t>
+              <a:t>Every one is a legitimate need: gross for the field, settlement for the ledger, reinvestments for the fund, approved adjustments for the board. Today they are four numbers with the same name and no bridge between them.</a:t>
             </a:r>
             <a:endParaRPr lang="en-US" sz="1509" dirty="0"/>
           </a:p>
@@ -10538,7 +10280,7 @@
                 </a:solidFill>
                 <a:latin typeface="Arial"/>
               </a:rPr>
-              <a:t>One certified number. A named reason for every difference.</a:t>
+              <a:t>One certified base. A named measure for every need.</a:t>
             </a:r>
           </a:p>
         </p:txBody>
@@ -10573,7 +10315,7 @@
                 </a:solidFill>
                 <a:latin typeface="Arial"/>
               </a:rPr>
-              <a:t>THE FIVE ANSWERS, RESOLVED</a:t>
+              <a:t>FOUR NEEDS, ONE BASE</a:t>
             </a:r>
           </a:p>
         </p:txBody>
@@ -10652,7 +10394,7 @@
                 </a:solidFill>
                 <a:latin typeface="Arial"/>
               </a:rPr>
-              <a:t>CERTIFIED NET FLOWS</a:t>
+              <a:t>THE CERTIFIED BASE</a:t>
             </a:r>
           </a:p>
         </p:txBody>
@@ -10722,7 +10464,7 @@
                 </a:solidFill>
                 <a:latin typeface="Arial"/>
               </a:rPr>
-              <a:t>Gross sales less redemptions, plus net exchanges, on trade date.</a:t>
+              <a:t>Net Flows: gross sales less redemptions, plus net exchanges, on trade date.</a:t>
             </a:r>
           </a:p>
           <a:p>
@@ -10754,7 +10496,7 @@
                 </a:solidFill>
                 <a:latin typeface="Arial"/>
               </a:rPr>
-              <a:t>Conversions and money market funds reported separately.</a:t>
+              <a:t>Every variant is this figure plus one named, certified line.</a:t>
             </a:r>
           </a:p>
         </p:txBody>
@@ -10789,7 +10531,7 @@
                 </a:solidFill>
                 <a:latin typeface="Arial"/>
               </a:rPr>
-              <a:t>Defined once, in the Certified Flows &amp; AUM data product. Owner: Head of Distribution Analytics. Every scorecard, payout and the assistant read it from there.</a:t>
+              <a:t>Defined once, in the Certified Flows &amp; AUM data product. Owner: Head of Distribution Analytics. The variants are defined there too, each under its own name.</a:t>
             </a:r>
           </a:p>
         </p:txBody>
@@ -10803,7 +10545,7 @@
         <p:spPr>
           <a:xfrm>
             <a:off x="3794760" y="2240280"/>
-            <a:ext cx="7891272" cy="640080"/>
+            <a:ext cx="7891272" cy="768096"/>
           </a:xfrm>
           <a:prstGeom prst="rect">
             <a:avLst/>
@@ -10847,7 +10589,7 @@
         <p:spPr>
           <a:xfrm>
             <a:off x="3941064" y="2240280"/>
-            <a:ext cx="1371600" cy="640080"/>
+            <a:ext cx="1371600" cy="768096"/>
           </a:xfrm>
           <a:prstGeom prst="rect">
             <a:avLst/>
@@ -10884,7 +10626,7 @@
                 </a:solidFill>
                 <a:latin typeface="Arial"/>
               </a:rPr>
-              <a:t>$2.41bn</a:t>
+              <a:t>$2.71bn</a:t>
             </a:r>
           </a:p>
         </p:txBody>
@@ -10898,7 +10640,7 @@
         <p:spPr>
           <a:xfrm>
             <a:off x="5422392" y="2240280"/>
-            <a:ext cx="2286000" cy="640080"/>
+            <a:ext cx="2286000" cy="768096"/>
           </a:xfrm>
           <a:prstGeom prst="rect">
             <a:avLst/>
@@ -10919,7 +10661,7 @@
                 </a:solidFill>
                 <a:latin typeface="Arial"/>
               </a:rPr>
-              <a:t>Counted exchanges in as gross and credited conversions to the rep.</a:t>
+              <a:t>Gross production: exchanges in counted, conversions credited to the rep.</a:t>
             </a:r>
           </a:p>
         </p:txBody>
@@ -10933,7 +10675,7 @@
         <p:spPr>
           <a:xfrm>
             <a:off x="7863840" y="2240280"/>
-            <a:ext cx="3675887" cy="640080"/>
+            <a:ext cx="3675887" cy="768096"/>
           </a:xfrm>
           <a:prstGeom prst="rect">
             <a:avLst/>
@@ -10954,7 +10696,7 @@
                 </a:solidFill>
                 <a:latin typeface="Arial"/>
               </a:rPr>
-              <a:t>Net, not gross. </a:t>
+              <a:t>Gross Sales, credited. </a:t>
             </a:r>
             <a:r>
               <a:rPr sz="1000" b="0">
@@ -10963,7 +10705,7 @@
                 </a:solidFill>
                 <a:latin typeface="Arial"/>
               </a:rPr>
-              <a:t>Exchanges net within the family and a conversion is the same money in a new class. Both still show, as their own lines.</a:t>
+              <a:t>Already certified: Gross Sales with Exchange Treatment = Include in Gross, and Credited Net Sales for the rep. Bridge: Net Flows plus Redemptions.</a:t>
             </a:r>
           </a:p>
         </p:txBody>
@@ -10976,8 +10718,8 @@
         </p:nvSpPr>
         <p:spPr>
           <a:xfrm>
-            <a:off x="3794760" y="2930652"/>
-            <a:ext cx="7891272" cy="640080"/>
+            <a:off x="3794760" y="3081528"/>
+            <a:ext cx="7891272" cy="768096"/>
           </a:xfrm>
           <a:prstGeom prst="rect">
             <a:avLst/>
@@ -11020,8 +10762,8 @@
         </p:nvSpPr>
         <p:spPr>
           <a:xfrm>
-            <a:off x="3941064" y="2930652"/>
-            <a:ext cx="1371600" cy="640080"/>
+            <a:off x="3941064" y="3081528"/>
+            <a:ext cx="1371600" cy="768096"/>
           </a:xfrm>
           <a:prstGeom prst="rect">
             <a:avLst/>
@@ -11071,8 +10813,8 @@
         </p:nvSpPr>
         <p:spPr>
           <a:xfrm>
-            <a:off x="5422392" y="2930652"/>
-            <a:ext cx="2286000" cy="640080"/>
+            <a:off x="5422392" y="3081528"/>
+            <a:ext cx="2286000" cy="768096"/>
           </a:xfrm>
           <a:prstGeom prst="rect">
             <a:avLst/>
@@ -11093,7 +10835,7 @@
                 </a:solidFill>
                 <a:latin typeface="Arial"/>
               </a:rPr>
-              <a:t>Settlement date, money market funds out, reinvestments out.</a:t>
+              <a:t>Settlement date, money market out, reinvestments out.</a:t>
             </a:r>
           </a:p>
         </p:txBody>
@@ -11106,8 +10848,8 @@
         </p:nvSpPr>
         <p:spPr>
           <a:xfrm>
-            <a:off x="7863840" y="2930652"/>
-            <a:ext cx="3675887" cy="640080"/>
+            <a:off x="7863840" y="3081528"/>
+            <a:ext cx="3675887" cy="768096"/>
           </a:xfrm>
           <a:prstGeom prst="rect">
             <a:avLst/>
@@ -11128,7 +10870,7 @@
                 </a:solidFill>
                 <a:latin typeface="Arial"/>
               </a:rPr>
-              <a:t>Same rule, different date. </a:t>
+              <a:t>Net Flows on settlement date. </a:t>
             </a:r>
             <a:r>
               <a:rPr sz="1000" b="0">
@@ -11137,7 +10879,7 @@
                 </a:solidFill>
                 <a:latin typeface="Arial"/>
               </a:rPr>
-              <a:t>Reinvestments are already out. Everyone uses trade date; money market flows are a separate published line.</a:t>
+              <a:t>A second definition version with Time Basis = Settlement Date, published under its own name beside the trade-date figure. Bridge: timing, closes at year end.</a:t>
             </a:r>
           </a:p>
         </p:txBody>
@@ -11150,8 +10892,8 @@
         </p:nvSpPr>
         <p:spPr>
           <a:xfrm>
-            <a:off x="3794760" y="3621024"/>
-            <a:ext cx="7891272" cy="640080"/>
+            <a:off x="3794760" y="3922776"/>
+            <a:ext cx="7891272" cy="768096"/>
           </a:xfrm>
           <a:prstGeom prst="rect">
             <a:avLst/>
@@ -11194,8 +10936,8 @@
         </p:nvSpPr>
         <p:spPr>
           <a:xfrm>
-            <a:off x="3941064" y="3621024"/>
-            <a:ext cx="1371600" cy="640080"/>
+            <a:off x="3941064" y="3922776"/>
+            <a:ext cx="1371600" cy="768096"/>
           </a:xfrm>
           <a:prstGeom prst="rect">
             <a:avLst/>
@@ -11245,8 +10987,8 @@
         </p:nvSpPr>
         <p:spPr>
           <a:xfrm>
-            <a:off x="5422392" y="3621024"/>
-            <a:ext cx="2286000" cy="640080"/>
+            <a:off x="5422392" y="3922776"/>
+            <a:ext cx="2286000" cy="768096"/>
           </a:xfrm>
           <a:prstGeom prst="rect">
             <a:avLst/>
@@ -11267,7 +11009,7 @@
                 </a:solidFill>
                 <a:latin typeface="Arial"/>
               </a:rPr>
-              <a:t>Rolled fund net assets forward, so reinvested distributions counted as sales.</a:t>
+              <a:t>Net flows plus reinvested distributions, so net assets roll forward.</a:t>
             </a:r>
           </a:p>
         </p:txBody>
@@ -11280,8 +11022,8 @@
         </p:nvSpPr>
         <p:spPr>
           <a:xfrm>
-            <a:off x="7863840" y="3621024"/>
-            <a:ext cx="3675887" cy="640080"/>
+            <a:off x="7863840" y="3922776"/>
+            <a:ext cx="3675887" cy="768096"/>
           </a:xfrm>
           <a:prstGeom prst="rect">
             <a:avLst/>
@@ -11302,7 +11044,7 @@
                 </a:solidFill>
                 <a:latin typeface="Arial"/>
               </a:rPr>
-              <a:t>One reinvestment rule. </a:t>
+              <a:t>Net Flows incl. reinvestments. </a:t>
             </a:r>
             <a:r>
               <a:rPr sz="1000" b="0">
@@ -11311,7 +11053,7 @@
                 </a:solidFill>
                 <a:latin typeface="Arial"/>
               </a:rPr>
-              <a:t>Reinvested distributions are market movement, not sales. The roll-forward still ties: flows plus market movement equals the change in AUM.</a:t>
+              <a:t>Reinvested Distributions is its own certified line; the variant is the two added. The roll-forward ties to Ending AUM by construction.</a:t>
             </a:r>
           </a:p>
         </p:txBody>
@@ -11324,8 +11066,8 @@
         </p:nvSpPr>
         <p:spPr>
           <a:xfrm>
-            <a:off x="3794760" y="4311396"/>
-            <a:ext cx="7891272" cy="640080"/>
+            <a:off x="3794760" y="4764024"/>
+            <a:ext cx="7891272" cy="768096"/>
           </a:xfrm>
           <a:prstGeom prst="rect">
             <a:avLst/>
@@ -11368,8 +11110,8 @@
         </p:nvSpPr>
         <p:spPr>
           <a:xfrm>
-            <a:off x="3941064" y="4311396"/>
-            <a:ext cx="1371600" cy="640080"/>
+            <a:off x="3941064" y="4764024"/>
+            <a:ext cx="1371600" cy="768096"/>
           </a:xfrm>
           <a:prstGeom prst="rect">
             <a:avLst/>
@@ -11390,7 +11132,7 @@
                 </a:solidFill>
                 <a:latin typeface="Arial"/>
               </a:rPr>
-              <a:t>PLATFORMS</a:t>
+              <a:t>EXECUTIVE PACK</a:t>
             </a:r>
           </a:p>
           <a:p>
@@ -11406,7 +11148,7 @@
                 </a:solidFill>
                 <a:latin typeface="Arial"/>
               </a:rPr>
-              <a:t>$2.67bn</a:t>
+              <a:t>$2.20bn</a:t>
             </a:r>
           </a:p>
         </p:txBody>
@@ -11419,8 +11161,8 @@
         </p:nvSpPr>
         <p:spPr>
           <a:xfrm>
-            <a:off x="5422392" y="4311396"/>
-            <a:ext cx="2286000" cy="640080"/>
+            <a:off x="5422392" y="4764024"/>
+            <a:ext cx="2286000" cy="768096"/>
           </a:xfrm>
           <a:prstGeom prst="rect">
             <a:avLst/>
@@ -11441,7 +11183,7 @@
                 </a:solidFill>
                 <a:latin typeface="Arial"/>
               </a:rPr>
-              <a:t>Counted platform omnibus totals and the sub-accounts under them.</a:t>
+              <a:t>Last quarter after two approved post-close adjustments.</a:t>
             </a:r>
           </a:p>
         </p:txBody>
@@ -11454,8 +11196,8 @@
         </p:nvSpPr>
         <p:spPr>
           <a:xfrm>
-            <a:off x="7863840" y="4311396"/>
-            <a:ext cx="3675887" cy="640080"/>
+            <a:off x="7863840" y="4764024"/>
+            <a:ext cx="3675887" cy="768096"/>
           </a:xfrm>
           <a:prstGeom prst="rect">
             <a:avLst/>
@@ -11476,7 +11218,7 @@
                 </a:solidFill>
                 <a:latin typeface="Arial"/>
               </a:rPr>
-              <a:t>Counted once, not twice. </a:t>
+              <a:t>Net Flows, restated snapshot. </a:t>
             </a:r>
             <a:r>
               <a:rPr sz="1000" b="0">
@@ -11485,27 +11227,27 @@
                 </a:solidFill>
                 <a:latin typeface="Arial"/>
               </a:rPr>
-              <a:t>The omnibus is the control total; the look-through rows are the attribution. One look-through level per record, never both.</a:t>
-            </a:r>
-          </a:p>
-        </p:txBody>
-      </p:sp>
-      <p:sp>
-        <p:nvSpPr>
-          <p:cNvPr id="25" name="Row 4"/>
-          <p:cNvSpPr/>
-          <p:nvPr/>
-        </p:nvSpPr>
-        <p:spPr>
-          <a:xfrm>
-            <a:off x="3794760" y="5001768"/>
-            <a:ext cx="7891272" cy="640080"/>
+              <a:t>Each adjustment is a Restatement row: reason, periods, amount, approver. The pack reads the Restated snapshot; Restatement Impact shows the bridge to Final.</a:t>
+            </a:r>
+          </a:p>
+        </p:txBody>
+      </p:sp>
+      <p:sp>
+        <p:nvSpPr>
+          <p:cNvPr id="25" name="Band"/>
+          <p:cNvSpPr/>
+          <p:nvPr/>
+        </p:nvSpPr>
+        <p:spPr>
+          <a:xfrm>
+            <a:off x="813816" y="5779008"/>
+            <a:ext cx="10872216" cy="475488"/>
           </a:xfrm>
           <a:prstGeom prst="rect">
             <a:avLst/>
           </a:prstGeom>
           <a:solidFill>
-            <a:srgbClr val="EEF1F8"/>
+            <a:srgbClr val="0C233C"/>
           </a:solidFill>
           <a:ln>
             <a:noFill/>
@@ -11542,8 +11284,8 @@
         </p:nvSpPr>
         <p:spPr>
           <a:xfrm>
-            <a:off x="3941064" y="5001768"/>
-            <a:ext cx="1371600" cy="640080"/>
+            <a:off x="1115568" y="5779008"/>
+            <a:ext cx="10287000" cy="475488"/>
           </a:xfrm>
           <a:prstGeom prst="rect">
             <a:avLst/>
@@ -11558,187 +11300,13 @@
           <a:p>
             <a:pPr algn="l"/>
             <a:r>
-              <a:rPr sz="900" b="1" spc="100">
-                <a:solidFill>
-                  <a:srgbClr val="535E6C"/>
+              <a:rPr sz="1300" b="0">
+                <a:solidFill>
+                  <a:srgbClr val="FFFFFF"/>
                 </a:solidFill>
                 <a:latin typeface="Arial"/>
               </a:rPr>
-              <a:t>EXECUTIVE PACK</a:t>
-            </a:r>
-          </a:p>
-          <a:p>
-            <a:pPr algn="l">
-              <a:spcBef>
-                <a:spcPts val="100"/>
-              </a:spcBef>
-            </a:pPr>
-            <a:r>
-              <a:rPr sz="1500" b="1">
-                <a:solidFill>
-                  <a:srgbClr val="535E6C"/>
-                </a:solidFill>
-                <a:latin typeface="Arial"/>
-              </a:rPr>
-              <a:t>$2.20bn</a:t>
-            </a:r>
-          </a:p>
-        </p:txBody>
-      </p:sp>
-      <p:sp>
-        <p:nvSpPr>
-          <p:cNvPr id="27" name="TextBox 26"/>
-          <p:cNvSpPr txBox="1"/>
-          <p:nvPr/>
-        </p:nvSpPr>
-        <p:spPr>
-          <a:xfrm>
-            <a:off x="5422392" y="5001768"/>
-            <a:ext cx="2286000" cy="640080"/>
-          </a:xfrm>
-          <a:prstGeom prst="rect">
-            <a:avLst/>
-          </a:prstGeom>
-          <a:noFill/>
-        </p:spPr>
-        <p:txBody>
-          <a:bodyPr wrap="square" lIns="0" rIns="0" tIns="0" bIns="0" anchor="ctr">
-            <a:spAutoFit/>
-          </a:bodyPr>
-          <a:lstStyle/>
-          <a:p>
-            <a:pPr algn="l"/>
-            <a:r>
-              <a:rPr sz="1000" b="0">
-                <a:solidFill>
-                  <a:srgbClr val="1A2B3C"/>
-                </a:solidFill>
-                <a:latin typeface="Arial"/>
-              </a:rPr>
-              <a:t>Adjusted by hand from last quarter’s method, twice restated.</a:t>
-            </a:r>
-          </a:p>
-        </p:txBody>
-      </p:sp>
-      <p:sp>
-        <p:nvSpPr>
-          <p:cNvPr id="28" name="TextBox 27"/>
-          <p:cNvSpPr txBox="1"/>
-          <p:nvPr/>
-        </p:nvSpPr>
-        <p:spPr>
-          <a:xfrm>
-            <a:off x="7863840" y="5001768"/>
-            <a:ext cx="3675887" cy="640080"/>
-          </a:xfrm>
-          <a:prstGeom prst="rect">
-            <a:avLst/>
-          </a:prstGeom>
-          <a:noFill/>
-        </p:spPr>
-        <p:txBody>
-          <a:bodyPr wrap="square" lIns="0" rIns="0" tIns="0" bIns="0" anchor="ctr">
-            <a:spAutoFit/>
-          </a:bodyPr>
-          <a:lstStyle/>
-          <a:p>
-            <a:pPr algn="l"/>
-            <a:r>
-              <a:rPr sz="1000" b="1">
-                <a:solidFill>
-                  <a:srgbClr val="1E49E2"/>
-                </a:solidFill>
-                <a:latin typeface="Arial"/>
-              </a:rPr>
-              <a:t>A dated snapshot. </a:t>
-            </a:r>
-            <a:r>
-              <a:rPr sz="1000" b="0">
-                <a:solidFill>
-                  <a:srgbClr val="1A2B3C"/>
-                </a:solidFill>
-                <a:latin typeface="Arial"/>
-              </a:rPr>
-              <a:t>The pack reads the locked figure, dated on every page. Each adjustment is a restatement row with a reason.</a:t>
-            </a:r>
-          </a:p>
-        </p:txBody>
-      </p:sp>
-      <p:sp>
-        <p:nvSpPr>
-          <p:cNvPr id="29" name="Band"/>
-          <p:cNvSpPr/>
-          <p:nvPr/>
-        </p:nvSpPr>
-        <p:spPr>
-          <a:xfrm>
-            <a:off x="813816" y="5779008"/>
-            <a:ext cx="10872216" cy="475488"/>
-          </a:xfrm>
-          <a:prstGeom prst="rect">
-            <a:avLst/>
-          </a:prstGeom>
-          <a:solidFill>
-            <a:srgbClr val="0C233C"/>
-          </a:solidFill>
-          <a:ln>
-            <a:noFill/>
-          </a:ln>
-          <a:effectLst/>
-        </p:spPr>
-        <p:style>
-          <a:lnRef idx="1">
-            <a:schemeClr val="accent1"/>
-          </a:lnRef>
-          <a:fillRef idx="3">
-            <a:schemeClr val="accent1"/>
-          </a:fillRef>
-          <a:effectRef idx="2">
-            <a:schemeClr val="accent1"/>
-          </a:effectRef>
-          <a:fontRef idx="minor">
-            <a:schemeClr val="lt1"/>
-          </a:fontRef>
-        </p:style>
-        <p:txBody>
-          <a:bodyPr rtlCol="0" anchor="ctr"/>
-          <a:lstStyle/>
-          <a:p>
-            <a:pPr algn="ctr"/>
-          </a:p>
-        </p:txBody>
-      </p:sp>
-      <p:sp>
-        <p:nvSpPr>
-          <p:cNvPr id="30" name="TextBox 29"/>
-          <p:cNvSpPr txBox="1"/>
-          <p:nvPr/>
-        </p:nvSpPr>
-        <p:spPr>
-          <a:xfrm>
-            <a:off x="1115568" y="5779008"/>
-            <a:ext cx="10287000" cy="475488"/>
-          </a:xfrm>
-          <a:prstGeom prst="rect">
-            <a:avLst/>
-          </a:prstGeom>
-          <a:noFill/>
-        </p:spPr>
-        <p:txBody>
-          <a:bodyPr wrap="square" lIns="0" rIns="0" tIns="0" bIns="0" anchor="ctr">
-            <a:spAutoFit/>
-          </a:bodyPr>
-          <a:lstStyle/>
-          <a:p>
-            <a:pPr algn="l"/>
-            <a:r>
-              <a:rPr sz="1300" b="0">
-                <a:solidFill>
-                  <a:srgbClr val="FFFFFF"/>
-                </a:solidFill>
-                <a:latin typeface="Arial"/>
-              </a:rPr>
-              <a:t>Five numbers become one certified figure, and every difference becomes a line on the page instead of an argument in the room.</a:t>
+              <a:t>Nobody loses their number. Each becomes a named measure, defined once, with a published bridge to the certified base.</a:t>
             </a:r>
           </a:p>
         </p:txBody>

--- a/Asset_Manager_Data_Pitch_Deck.pptx
+++ b/Asset_Manager_Data_Pitch_Deck.pptx
@@ -627,7 +627,7 @@
           <a:lstStyle/>
           <a:p>
             <a:r>
-              <a:t>Bring the four answers back. “Same question as slide two. Every one of these was a legitimate need, so the model keeps every one of them. What changes is that each is now a named measure, defined once, with a bridge to the certified base.” Point at the dark card first: one certified figure, one rule, one owner, and the variants defined in the same place. Then walk the rows, one sentence each: “Sales keeps gross production; it is already a certified measure, Gross Sales, with rep credit beside it. Finance keeps settlement date; that is a second definition version of the same measure, published under its own name, and the gap is timing. Product keeps the roll-forward; reinvested distributions are their own certified line, so the variant is two lines added. The executive pack keeps its post-close adjustments; each one becomes a restatement row with a reason and an approver, and the pack reads the restated snapshot.” Land the band: “Nobody lost their number. Each one became a named measure with a bridge, instead of a number with the same name as three others.” The figures are illustrative, like slide two. If asked why the base sits between Finance and Product: Finance is the base on a different date; Product is the base plus one line.</a:t>
+              <a:t>Bring the four answers back. “Same question as slide two. Every one of these was a legitimate need, so the model keeps every one of them. What changes is that each is now a named measure, defined once, with a bridge to the certified base.” Point at the dark card first: one certified figure, one rule, one owner, and the variants defined in the same place. Then walk the rows, one sentence each: “Sales keeps gross production; it is already a certified measure, Gross Sales, with rep credit beside it. Finance keeps settlement date; that is a second definition version of the same measure, published under its own name, and the gap is timing. Product keeps the roll-forward; reinvested distributions are their own certified line, so the variant is two lines added. The executive pack keeps its post-close adjustments; each one becomes a restatement row with a reason and an approver, and the pack reads the restated snapshot.” Land the band: “Nobody lost their number. Each one is a separately named metric in the semantic model with one owner; the definition sits in the taxonomy and the calculation runs once in the product.” Then the second axis, briefly: “Net flows also varies by grain: fund, advisor, wholesaler. Those are cuts of the same certified measure, with the crediting rule applied for the wholesaler, not new definitions. Only the wholesaler cut needs the territory product.” The figures are illustrative, like slide two. If asked why the base sits between Finance and Product: Finance is the base on a different date; Product is the base plus one line.</a:t>
             </a:r>
           </a:p>
         </p:txBody>
@@ -10531,7 +10531,7 @@
                 </a:solidFill>
                 <a:latin typeface="Arial"/>
               </a:rPr>
-              <a:t>Defined once, in the Certified Flows &amp; AUM data product. Owner: Head of Distribution Analytics. The variants are defined there too, each under its own name.</a:t>
+              <a:t>Each is a named metric in the semantic model with one owner: defined in the taxonomy, computed in Certified Flows &amp; AUM. Grain (fund, advisor, wholesaler) is a cut, not a new definition.</a:t>
             </a:r>
           </a:p>
         </p:txBody>
@@ -11306,7 +11306,7 @@
                 </a:solidFill>
                 <a:latin typeface="Arial"/>
               </a:rPr>
-              <a:t>Nobody loses their number. Each becomes a named measure, defined once, with a published bridge to the certified base.</a:t>
+              <a:t>Nobody loses their number. Each is a named metric in the semantic model with one owner, defined in the taxonomy, computed in the product, with a published bridge to the base.</a:t>
             </a:r>
           </a:p>
         </p:txBody>
